--- a/files/CS449/Petrucci/CS_0449_Recitation_3.pptx
+++ b/files/CS449/Petrucci/CS_0449_Recitation_3.pptx
@@ -5,7 +5,7 @@
     <p:sldMasterId id="2147483696" r:id="rId4"/>
   </p:sldMasterIdLst>
   <p:notesMasterIdLst>
-    <p:notesMasterId r:id="rId28"/>
+    <p:notesMasterId r:id="rId33"/>
   </p:notesMasterIdLst>
   <p:sldIdLst>
     <p:sldId id="256" r:id="rId5"/>
@@ -30,7 +30,12 @@
     <p:sldId id="276" r:id="rId24"/>
     <p:sldId id="277" r:id="rId25"/>
     <p:sldId id="278" r:id="rId26"/>
-    <p:sldId id="279" r:id="rId27"/>
+    <p:sldId id="280" r:id="rId27"/>
+    <p:sldId id="281" r:id="rId28"/>
+    <p:sldId id="282" r:id="rId29"/>
+    <p:sldId id="283" r:id="rId30"/>
+    <p:sldId id="284" r:id="rId31"/>
+    <p:sldId id="279" r:id="rId32"/>
   </p:sldIdLst>
   <p:sldSz cx="12192000" cy="6858000"/>
   <p:notesSz cx="6858000" cy="9144000"/>
@@ -9675,13 +9680,8 @@
           <a:p>
             <a:r>
               <a:rPr lang="en-US" dirty="0"/>
-              <a:t>Q&amp;A on </a:t>
-            </a:r>
-            <a:r>
-              <a:rPr lang="en-US"/>
-              <a:t>the Pointers Lab?</a:t>
-            </a:r>
-            <a:endParaRPr lang="en-US" dirty="0"/>
+              <a:t>Q&amp;A on the Pointers Lab?</a:t>
+            </a:r>
           </a:p>
         </p:txBody>
       </p:sp>
@@ -11316,6 +11316,1053 @@
 </file>
 
 <file path=ppt/slides/slide23.xml><?xml version="1.0" encoding="utf-8"?>
+<p:sld xmlns:a="http://schemas.openxmlformats.org/drawingml/2006/main" xmlns:r="http://schemas.openxmlformats.org/officeDocument/2006/relationships" xmlns:p="http://schemas.openxmlformats.org/presentationml/2006/main">
+  <p:cSld>
+    <p:spTree>
+      <p:nvGrpSpPr>
+        <p:cNvPr id="1" name=""/>
+        <p:cNvGrpSpPr/>
+        <p:nvPr/>
+      </p:nvGrpSpPr>
+      <p:grpSpPr>
+        <a:xfrm>
+          <a:off x="0" y="0"/>
+          <a:ext cx="0" cy="0"/>
+          <a:chOff x="0" y="0"/>
+          <a:chExt cx="0" cy="0"/>
+        </a:xfrm>
+      </p:grpSpPr>
+      <p:sp>
+        <p:nvSpPr>
+          <p:cNvPr id="2" name="Title 1">
+            <a:extLst>
+              <a:ext uri="{FF2B5EF4-FFF2-40B4-BE49-F238E27FC236}">
+                <a16:creationId xmlns:a16="http://schemas.microsoft.com/office/drawing/2014/main" id="{C100E508-39B2-434D-92DF-DFBD9304AFE8}"/>
+              </a:ext>
+            </a:extLst>
+          </p:cNvPr>
+          <p:cNvSpPr>
+            <a:spLocks noGrp="1"/>
+          </p:cNvSpPr>
+          <p:nvPr>
+            <p:ph type="ctrTitle"/>
+          </p:nvPr>
+        </p:nvSpPr>
+        <p:spPr/>
+        <p:txBody>
+          <a:bodyPr/>
+          <a:lstStyle/>
+          <a:p>
+            <a:r>
+              <a:rPr lang="en-US" dirty="0"/>
+              <a:t>Hints for the Lab</a:t>
+            </a:r>
+          </a:p>
+        </p:txBody>
+      </p:sp>
+    </p:spTree>
+    <p:extLst>
+      <p:ext uri="{BB962C8B-B14F-4D97-AF65-F5344CB8AC3E}">
+        <p14:creationId xmlns:p14="http://schemas.microsoft.com/office/powerpoint/2010/main" val="2942111932"/>
+      </p:ext>
+    </p:extLst>
+  </p:cSld>
+  <p:clrMapOvr>
+    <a:masterClrMapping/>
+  </p:clrMapOvr>
+</p:sld>
+</file>
+
+<file path=ppt/slides/slide24.xml><?xml version="1.0" encoding="utf-8"?>
+<p:sld xmlns:a="http://schemas.openxmlformats.org/drawingml/2006/main" xmlns:r="http://schemas.openxmlformats.org/officeDocument/2006/relationships" xmlns:p="http://schemas.openxmlformats.org/presentationml/2006/main">
+  <p:cSld>
+    <p:spTree>
+      <p:nvGrpSpPr>
+        <p:cNvPr id="1" name=""/>
+        <p:cNvGrpSpPr/>
+        <p:nvPr/>
+      </p:nvGrpSpPr>
+      <p:grpSpPr>
+        <a:xfrm>
+          <a:off x="0" y="0"/>
+          <a:ext cx="0" cy="0"/>
+          <a:chOff x="0" y="0"/>
+          <a:chExt cx="0" cy="0"/>
+        </a:xfrm>
+      </p:grpSpPr>
+      <p:sp>
+        <p:nvSpPr>
+          <p:cNvPr id="2" name="Title 1">
+            <a:extLst>
+              <a:ext uri="{FF2B5EF4-FFF2-40B4-BE49-F238E27FC236}">
+                <a16:creationId xmlns:a16="http://schemas.microsoft.com/office/drawing/2014/main" id="{31B050F4-3662-42B9-8F0B-A4BE8AD0A5E8}"/>
+              </a:ext>
+            </a:extLst>
+          </p:cNvPr>
+          <p:cNvSpPr>
+            <a:spLocks noGrp="1"/>
+          </p:cNvSpPr>
+          <p:nvPr>
+            <p:ph type="title"/>
+          </p:nvPr>
+        </p:nvSpPr>
+        <p:spPr/>
+        <p:txBody>
+          <a:bodyPr>
+            <a:normAutofit fontScale="90000"/>
+          </a:bodyPr>
+          <a:lstStyle/>
+          <a:p>
+            <a:r>
+              <a:rPr lang="en-US" dirty="0"/>
+              <a:t>Determining whether two pointers are in the same block in memory</a:t>
+            </a:r>
+          </a:p>
+        </p:txBody>
+      </p:sp>
+      <p:sp>
+        <p:nvSpPr>
+          <p:cNvPr id="3" name="Content Placeholder 2">
+            <a:extLst>
+              <a:ext uri="{FF2B5EF4-FFF2-40B4-BE49-F238E27FC236}">
+                <a16:creationId xmlns:a16="http://schemas.microsoft.com/office/drawing/2014/main" id="{D5A42DBF-1A07-48F3-B052-DB2AB53C5CF9}"/>
+              </a:ext>
+            </a:extLst>
+          </p:cNvPr>
+          <p:cNvSpPr>
+            <a:spLocks noGrp="1"/>
+          </p:cNvSpPr>
+          <p:nvPr>
+            <p:ph idx="1"/>
+          </p:nvPr>
+        </p:nvSpPr>
+        <p:spPr/>
+        <p:txBody>
+          <a:bodyPr/>
+          <a:lstStyle/>
+          <a:p>
+            <a:pPr marL="0" indent="0">
+              <a:buNone/>
+            </a:pPr>
+            <a:r>
+              <a:rPr lang="en-US" dirty="0"/>
+              <a:t>Consider the last 6 bits of a 32 bit number.</a:t>
+            </a:r>
+          </a:p>
+          <a:p>
+            <a:r>
+              <a:rPr lang="en-US" dirty="0"/>
+              <a:t>What is 2^6 in decimal?</a:t>
+            </a:r>
+          </a:p>
+          <a:p>
+            <a:r>
+              <a:rPr lang="en-US" dirty="0"/>
+              <a:t>64</a:t>
+            </a:r>
+          </a:p>
+          <a:p>
+            <a:endParaRPr lang="en-US" dirty="0"/>
+          </a:p>
+          <a:p>
+            <a:pPr marL="0" indent="0">
+              <a:buNone/>
+            </a:pPr>
+            <a:r>
+              <a:rPr lang="en-US" dirty="0"/>
+              <a:t>Now, if we shift of the lower 6 bits of two pointers, and they are still the same, then this implies that the original addresses must have been 64 bytes of each other.</a:t>
+            </a:r>
+          </a:p>
+        </p:txBody>
+      </p:sp>
+    </p:spTree>
+    <p:extLst>
+      <p:ext uri="{BB962C8B-B14F-4D97-AF65-F5344CB8AC3E}">
+        <p14:creationId xmlns:p14="http://schemas.microsoft.com/office/powerpoint/2010/main" val="2709126742"/>
+      </p:ext>
+    </p:extLst>
+  </p:cSld>
+  <p:clrMapOvr>
+    <a:masterClrMapping/>
+  </p:clrMapOvr>
+  <p:timing>
+    <p:tnLst>
+      <p:par>
+        <p:cTn id="1" dur="indefinite" restart="never" nodeType="tmRoot">
+          <p:childTnLst>
+            <p:seq concurrent="1" nextAc="seek">
+              <p:cTn id="2" dur="indefinite" nodeType="mainSeq">
+                <p:childTnLst>
+                  <p:par>
+                    <p:cTn id="3" fill="hold">
+                      <p:stCondLst>
+                        <p:cond delay="indefinite"/>
+                      </p:stCondLst>
+                      <p:childTnLst>
+                        <p:par>
+                          <p:cTn id="4" fill="hold">
+                            <p:stCondLst>
+                              <p:cond delay="0"/>
+                            </p:stCondLst>
+                            <p:childTnLst>
+                              <p:par>
+                                <p:cTn id="5" presetID="1" presetClass="entr" presetSubtype="0" fill="hold" grpId="0" nodeType="clickEffect">
+                                  <p:stCondLst>
+                                    <p:cond delay="0"/>
+                                  </p:stCondLst>
+                                  <p:childTnLst>
+                                    <p:set>
+                                      <p:cBhvr>
+                                        <p:cTn id="6" dur="1" fill="hold">
+                                          <p:stCondLst>
+                                            <p:cond delay="0"/>
+                                          </p:stCondLst>
+                                        </p:cTn>
+                                        <p:tgtEl>
+                                          <p:spTgt spid="3">
+                                            <p:txEl>
+                                              <p:pRg st="0" end="0"/>
+                                            </p:txEl>
+                                          </p:spTgt>
+                                        </p:tgtEl>
+                                        <p:attrNameLst>
+                                          <p:attrName>style.visibility</p:attrName>
+                                        </p:attrNameLst>
+                                      </p:cBhvr>
+                                      <p:to>
+                                        <p:strVal val="visible"/>
+                                      </p:to>
+                                    </p:set>
+                                  </p:childTnLst>
+                                </p:cTn>
+                              </p:par>
+                            </p:childTnLst>
+                          </p:cTn>
+                        </p:par>
+                      </p:childTnLst>
+                    </p:cTn>
+                  </p:par>
+                  <p:par>
+                    <p:cTn id="7" fill="hold">
+                      <p:stCondLst>
+                        <p:cond delay="indefinite"/>
+                      </p:stCondLst>
+                      <p:childTnLst>
+                        <p:par>
+                          <p:cTn id="8" fill="hold">
+                            <p:stCondLst>
+                              <p:cond delay="0"/>
+                            </p:stCondLst>
+                            <p:childTnLst>
+                              <p:par>
+                                <p:cTn id="9" presetID="1" presetClass="entr" presetSubtype="0" fill="hold" grpId="0" nodeType="clickEffect">
+                                  <p:stCondLst>
+                                    <p:cond delay="0"/>
+                                  </p:stCondLst>
+                                  <p:childTnLst>
+                                    <p:set>
+                                      <p:cBhvr>
+                                        <p:cTn id="10" dur="1" fill="hold">
+                                          <p:stCondLst>
+                                            <p:cond delay="0"/>
+                                          </p:stCondLst>
+                                        </p:cTn>
+                                        <p:tgtEl>
+                                          <p:spTgt spid="3">
+                                            <p:txEl>
+                                              <p:pRg st="1" end="1"/>
+                                            </p:txEl>
+                                          </p:spTgt>
+                                        </p:tgtEl>
+                                        <p:attrNameLst>
+                                          <p:attrName>style.visibility</p:attrName>
+                                        </p:attrNameLst>
+                                      </p:cBhvr>
+                                      <p:to>
+                                        <p:strVal val="visible"/>
+                                      </p:to>
+                                    </p:set>
+                                  </p:childTnLst>
+                                </p:cTn>
+                              </p:par>
+                            </p:childTnLst>
+                          </p:cTn>
+                        </p:par>
+                      </p:childTnLst>
+                    </p:cTn>
+                  </p:par>
+                  <p:par>
+                    <p:cTn id="11" fill="hold">
+                      <p:stCondLst>
+                        <p:cond delay="indefinite"/>
+                      </p:stCondLst>
+                      <p:childTnLst>
+                        <p:par>
+                          <p:cTn id="12" fill="hold">
+                            <p:stCondLst>
+                              <p:cond delay="0"/>
+                            </p:stCondLst>
+                            <p:childTnLst>
+                              <p:par>
+                                <p:cTn id="13" presetID="1" presetClass="entr" presetSubtype="0" fill="hold" grpId="0" nodeType="clickEffect">
+                                  <p:stCondLst>
+                                    <p:cond delay="0"/>
+                                  </p:stCondLst>
+                                  <p:childTnLst>
+                                    <p:set>
+                                      <p:cBhvr>
+                                        <p:cTn id="14" dur="1" fill="hold">
+                                          <p:stCondLst>
+                                            <p:cond delay="0"/>
+                                          </p:stCondLst>
+                                        </p:cTn>
+                                        <p:tgtEl>
+                                          <p:spTgt spid="3">
+                                            <p:txEl>
+                                              <p:pRg st="2" end="2"/>
+                                            </p:txEl>
+                                          </p:spTgt>
+                                        </p:tgtEl>
+                                        <p:attrNameLst>
+                                          <p:attrName>style.visibility</p:attrName>
+                                        </p:attrNameLst>
+                                      </p:cBhvr>
+                                      <p:to>
+                                        <p:strVal val="visible"/>
+                                      </p:to>
+                                    </p:set>
+                                  </p:childTnLst>
+                                </p:cTn>
+                              </p:par>
+                            </p:childTnLst>
+                          </p:cTn>
+                        </p:par>
+                      </p:childTnLst>
+                    </p:cTn>
+                  </p:par>
+                  <p:par>
+                    <p:cTn id="15" fill="hold">
+                      <p:stCondLst>
+                        <p:cond delay="indefinite"/>
+                      </p:stCondLst>
+                      <p:childTnLst>
+                        <p:par>
+                          <p:cTn id="16" fill="hold">
+                            <p:stCondLst>
+                              <p:cond delay="0"/>
+                            </p:stCondLst>
+                            <p:childTnLst>
+                              <p:par>
+                                <p:cTn id="17" presetID="1" presetClass="entr" presetSubtype="0" fill="hold" grpId="0" nodeType="clickEffect">
+                                  <p:stCondLst>
+                                    <p:cond delay="0"/>
+                                  </p:stCondLst>
+                                  <p:childTnLst>
+                                    <p:set>
+                                      <p:cBhvr>
+                                        <p:cTn id="18" dur="1" fill="hold">
+                                          <p:stCondLst>
+                                            <p:cond delay="0"/>
+                                          </p:stCondLst>
+                                        </p:cTn>
+                                        <p:tgtEl>
+                                          <p:spTgt spid="3">
+                                            <p:txEl>
+                                              <p:pRg st="4" end="4"/>
+                                            </p:txEl>
+                                          </p:spTgt>
+                                        </p:tgtEl>
+                                        <p:attrNameLst>
+                                          <p:attrName>style.visibility</p:attrName>
+                                        </p:attrNameLst>
+                                      </p:cBhvr>
+                                      <p:to>
+                                        <p:strVal val="visible"/>
+                                      </p:to>
+                                    </p:set>
+                                  </p:childTnLst>
+                                </p:cTn>
+                              </p:par>
+                            </p:childTnLst>
+                          </p:cTn>
+                        </p:par>
+                      </p:childTnLst>
+                    </p:cTn>
+                  </p:par>
+                </p:childTnLst>
+              </p:cTn>
+              <p:prevCondLst>
+                <p:cond evt="onPrev" delay="0">
+                  <p:tgtEl>
+                    <p:sldTgt/>
+                  </p:tgtEl>
+                </p:cond>
+              </p:prevCondLst>
+              <p:nextCondLst>
+                <p:cond evt="onNext" delay="0">
+                  <p:tgtEl>
+                    <p:sldTgt/>
+                  </p:tgtEl>
+                </p:cond>
+              </p:nextCondLst>
+            </p:seq>
+          </p:childTnLst>
+        </p:cTn>
+      </p:par>
+    </p:tnLst>
+    <p:bldLst>
+      <p:bldP spid="3" grpId="0" build="p"/>
+    </p:bldLst>
+  </p:timing>
+</p:sld>
+</file>
+
+<file path=ppt/slides/slide25.xml><?xml version="1.0" encoding="utf-8"?>
+<p:sld xmlns:a="http://schemas.openxmlformats.org/drawingml/2006/main" xmlns:r="http://schemas.openxmlformats.org/officeDocument/2006/relationships" xmlns:p="http://schemas.openxmlformats.org/presentationml/2006/main">
+  <p:cSld>
+    <p:spTree>
+      <p:nvGrpSpPr>
+        <p:cNvPr id="1" name=""/>
+        <p:cNvGrpSpPr/>
+        <p:nvPr/>
+      </p:nvGrpSpPr>
+      <p:grpSpPr>
+        <a:xfrm>
+          <a:off x="0" y="0"/>
+          <a:ext cx="0" cy="0"/>
+          <a:chOff x="0" y="0"/>
+          <a:chExt cx="0" cy="0"/>
+        </a:xfrm>
+      </p:grpSpPr>
+      <p:sp>
+        <p:nvSpPr>
+          <p:cNvPr id="2" name="Title 1">
+            <a:extLst>
+              <a:ext uri="{FF2B5EF4-FFF2-40B4-BE49-F238E27FC236}">
+                <a16:creationId xmlns:a16="http://schemas.microsoft.com/office/drawing/2014/main" id="{DF2FD001-8B55-4D47-A889-955875CFBE36}"/>
+              </a:ext>
+            </a:extLst>
+          </p:cNvPr>
+          <p:cNvSpPr>
+            <a:spLocks noGrp="1"/>
+          </p:cNvSpPr>
+          <p:nvPr>
+            <p:ph type="title"/>
+          </p:nvPr>
+        </p:nvSpPr>
+        <p:spPr/>
+        <p:txBody>
+          <a:bodyPr>
+            <a:normAutofit fontScale="90000"/>
+          </a:bodyPr>
+          <a:lstStyle/>
+          <a:p>
+            <a:r>
+              <a:rPr lang="en-US" dirty="0"/>
+              <a:t>Determining whether a pointer points to an element in a given array</a:t>
+            </a:r>
+          </a:p>
+        </p:txBody>
+      </p:sp>
+      <p:sp>
+        <p:nvSpPr>
+          <p:cNvPr id="3" name="Content Placeholder 2">
+            <a:extLst>
+              <a:ext uri="{FF2B5EF4-FFF2-40B4-BE49-F238E27FC236}">
+                <a16:creationId xmlns:a16="http://schemas.microsoft.com/office/drawing/2014/main" id="{4F316380-23AB-430B-8B6B-ABC8F59C51FB}"/>
+              </a:ext>
+            </a:extLst>
+          </p:cNvPr>
+          <p:cNvSpPr>
+            <a:spLocks noGrp="1"/>
+          </p:cNvSpPr>
+          <p:nvPr>
+            <p:ph idx="1"/>
+          </p:nvPr>
+        </p:nvSpPr>
+        <p:spPr/>
+        <p:txBody>
+          <a:bodyPr/>
+          <a:lstStyle/>
+          <a:p>
+            <a:pPr marL="0" indent="0">
+              <a:buNone/>
+            </a:pPr>
+            <a:r>
+              <a:rPr lang="en-US" dirty="0"/>
+              <a:t>First, let’s extract the distance between the pointer and the array.</a:t>
+            </a:r>
+          </a:p>
+          <a:p>
+            <a:pPr marL="342900" indent="-342900">
+              <a:buAutoNum type="arabicParenR"/>
+            </a:pPr>
+            <a:r>
+              <a:rPr lang="en-US" dirty="0"/>
+              <a:t>Let’s now consider this distance as the base address of our array.</a:t>
+            </a:r>
+          </a:p>
+          <a:p>
+            <a:r>
+              <a:rPr lang="en-US" dirty="0"/>
+              <a:t>Let’s extract the sign out of this distance</a:t>
+            </a:r>
+          </a:p>
+          <a:p>
+            <a:pPr marL="342900" indent="-342900">
+              <a:buFont typeface="+mj-lt"/>
+              <a:buAutoNum type="arabicParenR" startAt="2"/>
+            </a:pPr>
+            <a:r>
+              <a:rPr lang="en-US" dirty="0"/>
+              <a:t>Now, let’s use this distance to extract the proposed last element’s size.</a:t>
+            </a:r>
+          </a:p>
+          <a:p>
+            <a:pPr marL="342900" indent="-342900">
+              <a:buFont typeface="+mj-lt"/>
+              <a:buAutoNum type="arabicParenR" startAt="2"/>
+            </a:pPr>
+            <a:r>
+              <a:rPr lang="en-US" dirty="0"/>
+              <a:t>If the sign of the first element using this proposed distance and the last elements are different, they cannot possibly live in the array.</a:t>
+            </a:r>
+          </a:p>
+          <a:p>
+            <a:pPr marL="342900" indent="-342900">
+              <a:buAutoNum type="arabicParenR" startAt="2"/>
+            </a:pPr>
+            <a:endParaRPr lang="en-US" dirty="0"/>
+          </a:p>
+          <a:p>
+            <a:pPr marL="342900" indent="-342900">
+              <a:buAutoNum type="arabicParenR" startAt="2"/>
+            </a:pPr>
+            <a:endParaRPr lang="en-US" dirty="0"/>
+          </a:p>
+          <a:p>
+            <a:pPr marL="0" indent="0">
+              <a:buNone/>
+            </a:pPr>
+            <a:endParaRPr lang="en-US" dirty="0"/>
+          </a:p>
+        </p:txBody>
+      </p:sp>
+    </p:spTree>
+    <p:extLst>
+      <p:ext uri="{BB962C8B-B14F-4D97-AF65-F5344CB8AC3E}">
+        <p14:creationId xmlns:p14="http://schemas.microsoft.com/office/powerpoint/2010/main" val="4052829482"/>
+      </p:ext>
+    </p:extLst>
+  </p:cSld>
+  <p:clrMapOvr>
+    <a:masterClrMapping/>
+  </p:clrMapOvr>
+  <p:timing>
+    <p:tnLst>
+      <p:par>
+        <p:cTn id="1" dur="indefinite" restart="never" nodeType="tmRoot">
+          <p:childTnLst>
+            <p:seq concurrent="1" nextAc="seek">
+              <p:cTn id="2" dur="indefinite" nodeType="mainSeq">
+                <p:childTnLst>
+                  <p:par>
+                    <p:cTn id="3" fill="hold">
+                      <p:stCondLst>
+                        <p:cond delay="indefinite"/>
+                      </p:stCondLst>
+                      <p:childTnLst>
+                        <p:par>
+                          <p:cTn id="4" fill="hold">
+                            <p:stCondLst>
+                              <p:cond delay="0"/>
+                            </p:stCondLst>
+                            <p:childTnLst>
+                              <p:par>
+                                <p:cTn id="5" presetID="1" presetClass="entr" presetSubtype="0" fill="hold" grpId="0" nodeType="clickEffect">
+                                  <p:stCondLst>
+                                    <p:cond delay="0"/>
+                                  </p:stCondLst>
+                                  <p:childTnLst>
+                                    <p:set>
+                                      <p:cBhvr>
+                                        <p:cTn id="6" dur="1" fill="hold">
+                                          <p:stCondLst>
+                                            <p:cond delay="0"/>
+                                          </p:stCondLst>
+                                        </p:cTn>
+                                        <p:tgtEl>
+                                          <p:spTgt spid="3">
+                                            <p:txEl>
+                                              <p:pRg st="0" end="0"/>
+                                            </p:txEl>
+                                          </p:spTgt>
+                                        </p:tgtEl>
+                                        <p:attrNameLst>
+                                          <p:attrName>style.visibility</p:attrName>
+                                        </p:attrNameLst>
+                                      </p:cBhvr>
+                                      <p:to>
+                                        <p:strVal val="visible"/>
+                                      </p:to>
+                                    </p:set>
+                                  </p:childTnLst>
+                                </p:cTn>
+                              </p:par>
+                            </p:childTnLst>
+                          </p:cTn>
+                        </p:par>
+                      </p:childTnLst>
+                    </p:cTn>
+                  </p:par>
+                  <p:par>
+                    <p:cTn id="7" fill="hold">
+                      <p:stCondLst>
+                        <p:cond delay="indefinite"/>
+                      </p:stCondLst>
+                      <p:childTnLst>
+                        <p:par>
+                          <p:cTn id="8" fill="hold">
+                            <p:stCondLst>
+                              <p:cond delay="0"/>
+                            </p:stCondLst>
+                            <p:childTnLst>
+                              <p:par>
+                                <p:cTn id="9" presetID="1" presetClass="entr" presetSubtype="0" fill="hold" grpId="0" nodeType="clickEffect">
+                                  <p:stCondLst>
+                                    <p:cond delay="0"/>
+                                  </p:stCondLst>
+                                  <p:childTnLst>
+                                    <p:set>
+                                      <p:cBhvr>
+                                        <p:cTn id="10" dur="1" fill="hold">
+                                          <p:stCondLst>
+                                            <p:cond delay="0"/>
+                                          </p:stCondLst>
+                                        </p:cTn>
+                                        <p:tgtEl>
+                                          <p:spTgt spid="3">
+                                            <p:txEl>
+                                              <p:pRg st="1" end="1"/>
+                                            </p:txEl>
+                                          </p:spTgt>
+                                        </p:tgtEl>
+                                        <p:attrNameLst>
+                                          <p:attrName>style.visibility</p:attrName>
+                                        </p:attrNameLst>
+                                      </p:cBhvr>
+                                      <p:to>
+                                        <p:strVal val="visible"/>
+                                      </p:to>
+                                    </p:set>
+                                  </p:childTnLst>
+                                </p:cTn>
+                              </p:par>
+                            </p:childTnLst>
+                          </p:cTn>
+                        </p:par>
+                      </p:childTnLst>
+                    </p:cTn>
+                  </p:par>
+                  <p:par>
+                    <p:cTn id="11" fill="hold">
+                      <p:stCondLst>
+                        <p:cond delay="indefinite"/>
+                      </p:stCondLst>
+                      <p:childTnLst>
+                        <p:par>
+                          <p:cTn id="12" fill="hold">
+                            <p:stCondLst>
+                              <p:cond delay="0"/>
+                            </p:stCondLst>
+                            <p:childTnLst>
+                              <p:par>
+                                <p:cTn id="13" presetID="1" presetClass="entr" presetSubtype="0" fill="hold" grpId="0" nodeType="clickEffect">
+                                  <p:stCondLst>
+                                    <p:cond delay="0"/>
+                                  </p:stCondLst>
+                                  <p:childTnLst>
+                                    <p:set>
+                                      <p:cBhvr>
+                                        <p:cTn id="14" dur="1" fill="hold">
+                                          <p:stCondLst>
+                                            <p:cond delay="0"/>
+                                          </p:stCondLst>
+                                        </p:cTn>
+                                        <p:tgtEl>
+                                          <p:spTgt spid="3">
+                                            <p:txEl>
+                                              <p:pRg st="2" end="2"/>
+                                            </p:txEl>
+                                          </p:spTgt>
+                                        </p:tgtEl>
+                                        <p:attrNameLst>
+                                          <p:attrName>style.visibility</p:attrName>
+                                        </p:attrNameLst>
+                                      </p:cBhvr>
+                                      <p:to>
+                                        <p:strVal val="visible"/>
+                                      </p:to>
+                                    </p:set>
+                                  </p:childTnLst>
+                                </p:cTn>
+                              </p:par>
+                            </p:childTnLst>
+                          </p:cTn>
+                        </p:par>
+                      </p:childTnLst>
+                    </p:cTn>
+                  </p:par>
+                  <p:par>
+                    <p:cTn id="15" fill="hold">
+                      <p:stCondLst>
+                        <p:cond delay="indefinite"/>
+                      </p:stCondLst>
+                      <p:childTnLst>
+                        <p:par>
+                          <p:cTn id="16" fill="hold">
+                            <p:stCondLst>
+                              <p:cond delay="0"/>
+                            </p:stCondLst>
+                            <p:childTnLst>
+                              <p:par>
+                                <p:cTn id="17" presetID="1" presetClass="entr" presetSubtype="0" fill="hold" grpId="0" nodeType="clickEffect">
+                                  <p:stCondLst>
+                                    <p:cond delay="0"/>
+                                  </p:stCondLst>
+                                  <p:childTnLst>
+                                    <p:set>
+                                      <p:cBhvr>
+                                        <p:cTn id="18" dur="1" fill="hold">
+                                          <p:stCondLst>
+                                            <p:cond delay="0"/>
+                                          </p:stCondLst>
+                                        </p:cTn>
+                                        <p:tgtEl>
+                                          <p:spTgt spid="3">
+                                            <p:txEl>
+                                              <p:pRg st="3" end="3"/>
+                                            </p:txEl>
+                                          </p:spTgt>
+                                        </p:tgtEl>
+                                        <p:attrNameLst>
+                                          <p:attrName>style.visibility</p:attrName>
+                                        </p:attrNameLst>
+                                      </p:cBhvr>
+                                      <p:to>
+                                        <p:strVal val="visible"/>
+                                      </p:to>
+                                    </p:set>
+                                  </p:childTnLst>
+                                </p:cTn>
+                              </p:par>
+                            </p:childTnLst>
+                          </p:cTn>
+                        </p:par>
+                      </p:childTnLst>
+                    </p:cTn>
+                  </p:par>
+                  <p:par>
+                    <p:cTn id="19" fill="hold">
+                      <p:stCondLst>
+                        <p:cond delay="indefinite"/>
+                      </p:stCondLst>
+                      <p:childTnLst>
+                        <p:par>
+                          <p:cTn id="20" fill="hold">
+                            <p:stCondLst>
+                              <p:cond delay="0"/>
+                            </p:stCondLst>
+                            <p:childTnLst>
+                              <p:par>
+                                <p:cTn id="21" presetID="1" presetClass="entr" presetSubtype="0" fill="hold" grpId="0" nodeType="clickEffect">
+                                  <p:stCondLst>
+                                    <p:cond delay="0"/>
+                                  </p:stCondLst>
+                                  <p:childTnLst>
+                                    <p:set>
+                                      <p:cBhvr>
+                                        <p:cTn id="22" dur="1" fill="hold">
+                                          <p:stCondLst>
+                                            <p:cond delay="0"/>
+                                          </p:stCondLst>
+                                        </p:cTn>
+                                        <p:tgtEl>
+                                          <p:spTgt spid="3">
+                                            <p:txEl>
+                                              <p:pRg st="4" end="4"/>
+                                            </p:txEl>
+                                          </p:spTgt>
+                                        </p:tgtEl>
+                                        <p:attrNameLst>
+                                          <p:attrName>style.visibility</p:attrName>
+                                        </p:attrNameLst>
+                                      </p:cBhvr>
+                                      <p:to>
+                                        <p:strVal val="visible"/>
+                                      </p:to>
+                                    </p:set>
+                                  </p:childTnLst>
+                                </p:cTn>
+                              </p:par>
+                            </p:childTnLst>
+                          </p:cTn>
+                        </p:par>
+                      </p:childTnLst>
+                    </p:cTn>
+                  </p:par>
+                </p:childTnLst>
+              </p:cTn>
+              <p:prevCondLst>
+                <p:cond evt="onPrev" delay="0">
+                  <p:tgtEl>
+                    <p:sldTgt/>
+                  </p:tgtEl>
+                </p:cond>
+              </p:prevCondLst>
+              <p:nextCondLst>
+                <p:cond evt="onNext" delay="0">
+                  <p:tgtEl>
+                    <p:sldTgt/>
+                  </p:tgtEl>
+                </p:cond>
+              </p:nextCondLst>
+            </p:seq>
+          </p:childTnLst>
+        </p:cTn>
+      </p:par>
+    </p:tnLst>
+    <p:bldLst>
+      <p:bldP spid="3" grpId="0" build="p"/>
+    </p:bldLst>
+  </p:timing>
+</p:sld>
+</file>
+
+<file path=ppt/slides/slide26.xml><?xml version="1.0" encoding="utf-8"?>
+<p:sld xmlns:a="http://schemas.openxmlformats.org/drawingml/2006/main" xmlns:r="http://schemas.openxmlformats.org/officeDocument/2006/relationships" xmlns:p="http://schemas.openxmlformats.org/presentationml/2006/main">
+  <p:cSld>
+    <p:spTree>
+      <p:nvGrpSpPr>
+        <p:cNvPr id="1" name=""/>
+        <p:cNvGrpSpPr/>
+        <p:nvPr/>
+      </p:nvGrpSpPr>
+      <p:grpSpPr>
+        <a:xfrm>
+          <a:off x="0" y="0"/>
+          <a:ext cx="0" cy="0"/>
+          <a:chOff x="0" y="0"/>
+          <a:chExt cx="0" cy="0"/>
+        </a:xfrm>
+      </p:grpSpPr>
+      <p:sp>
+        <p:nvSpPr>
+          <p:cNvPr id="2" name="Title 1">
+            <a:extLst>
+              <a:ext uri="{FF2B5EF4-FFF2-40B4-BE49-F238E27FC236}">
+                <a16:creationId xmlns:a16="http://schemas.microsoft.com/office/drawing/2014/main" id="{A8BED378-D942-4CEC-88A5-613B1B51CC29}"/>
+              </a:ext>
+            </a:extLst>
+          </p:cNvPr>
+          <p:cNvSpPr>
+            <a:spLocks noGrp="1"/>
+          </p:cNvSpPr>
+          <p:nvPr>
+            <p:ph type="title"/>
+          </p:nvPr>
+        </p:nvSpPr>
+        <p:spPr/>
+        <p:txBody>
+          <a:bodyPr/>
+          <a:lstStyle/>
+          <a:p>
+            <a:r>
+              <a:rPr lang="en-US" dirty="0"/>
+              <a:t>General Hints</a:t>
+            </a:r>
+          </a:p>
+        </p:txBody>
+      </p:sp>
+      <p:sp>
+        <p:nvSpPr>
+          <p:cNvPr id="3" name="Content Placeholder 2">
+            <a:extLst>
+              <a:ext uri="{FF2B5EF4-FFF2-40B4-BE49-F238E27FC236}">
+                <a16:creationId xmlns:a16="http://schemas.microsoft.com/office/drawing/2014/main" id="{EFE66A22-B267-4995-A02F-995A45C9298B}"/>
+              </a:ext>
+            </a:extLst>
+          </p:cNvPr>
+          <p:cNvSpPr>
+            <a:spLocks noGrp="1"/>
+          </p:cNvSpPr>
+          <p:nvPr>
+            <p:ph idx="1"/>
+          </p:nvPr>
+        </p:nvSpPr>
+        <p:spPr/>
+        <p:txBody>
+          <a:bodyPr/>
+          <a:lstStyle/>
+          <a:p>
+            <a:r>
+              <a:rPr lang="en-US" dirty="0"/>
+              <a:t>Always return pointers. Never ever return arrays, they don’t exist in C!!!</a:t>
+            </a:r>
+          </a:p>
+          <a:p>
+            <a:endParaRPr lang="en-US" dirty="0"/>
+          </a:p>
+          <a:p>
+            <a:r>
+              <a:rPr lang="en-US" dirty="0"/>
+              <a:t>Remember what dereferencing a pointer really means. </a:t>
+            </a:r>
+          </a:p>
+          <a:p>
+            <a:pPr lvl="1"/>
+            <a:r>
+              <a:rPr lang="en-US" dirty="0"/>
+              <a:t>Or for that matter, what accessing an element at the </a:t>
+            </a:r>
+            <a:r>
+              <a:rPr lang="en-US" dirty="0" err="1"/>
+              <a:t>ith</a:t>
+            </a:r>
+            <a:r>
+              <a:rPr lang="en-US" dirty="0"/>
+              <a:t> position of an array means.</a:t>
+            </a:r>
+          </a:p>
+          <a:p>
+            <a:endParaRPr lang="en-US" dirty="0"/>
+          </a:p>
+          <a:p>
+            <a:r>
+              <a:rPr lang="en-US" dirty="0"/>
+              <a:t>Remember how we know we’re at the end of a string.</a:t>
+            </a:r>
+          </a:p>
+          <a:p>
+            <a:endParaRPr lang="en-US" dirty="0"/>
+          </a:p>
+          <a:p>
+            <a:endParaRPr lang="en-US" dirty="0"/>
+          </a:p>
+        </p:txBody>
+      </p:sp>
+    </p:spTree>
+    <p:extLst>
+      <p:ext uri="{BB962C8B-B14F-4D97-AF65-F5344CB8AC3E}">
+        <p14:creationId xmlns:p14="http://schemas.microsoft.com/office/powerpoint/2010/main" val="2271134554"/>
+      </p:ext>
+    </p:extLst>
+  </p:cSld>
+  <p:clrMapOvr>
+    <a:masterClrMapping/>
+  </p:clrMapOvr>
+</p:sld>
+</file>
+
+<file path=ppt/slides/slide27.xml><?xml version="1.0" encoding="utf-8"?>
+<p:sld xmlns:a="http://schemas.openxmlformats.org/drawingml/2006/main" xmlns:r="http://schemas.openxmlformats.org/officeDocument/2006/relationships" xmlns:p="http://schemas.openxmlformats.org/presentationml/2006/main">
+  <p:cSld>
+    <p:spTree>
+      <p:nvGrpSpPr>
+        <p:cNvPr id="1" name=""/>
+        <p:cNvGrpSpPr/>
+        <p:nvPr/>
+      </p:nvGrpSpPr>
+      <p:grpSpPr>
+        <a:xfrm>
+          <a:off x="0" y="0"/>
+          <a:ext cx="0" cy="0"/>
+          <a:chOff x="0" y="0"/>
+          <a:chExt cx="0" cy="0"/>
+        </a:xfrm>
+      </p:grpSpPr>
+      <p:sp>
+        <p:nvSpPr>
+          <p:cNvPr id="2" name="Title 1">
+            <a:extLst>
+              <a:ext uri="{FF2B5EF4-FFF2-40B4-BE49-F238E27FC236}">
+                <a16:creationId xmlns:a16="http://schemas.microsoft.com/office/drawing/2014/main" id="{4CF0CA9A-0FAE-4314-9FB7-0C40AEF12A16}"/>
+              </a:ext>
+            </a:extLst>
+          </p:cNvPr>
+          <p:cNvSpPr>
+            <a:spLocks noGrp="1"/>
+          </p:cNvSpPr>
+          <p:nvPr>
+            <p:ph type="title"/>
+          </p:nvPr>
+        </p:nvSpPr>
+        <p:spPr/>
+        <p:txBody>
+          <a:bodyPr/>
+          <a:lstStyle/>
+          <a:p>
+            <a:r>
+              <a:rPr lang="en-US" dirty="0"/>
+              <a:t>What’s in store for next time</a:t>
+            </a:r>
+          </a:p>
+        </p:txBody>
+      </p:sp>
+      <p:sp>
+        <p:nvSpPr>
+          <p:cNvPr id="3" name="Content Placeholder 2">
+            <a:extLst>
+              <a:ext uri="{FF2B5EF4-FFF2-40B4-BE49-F238E27FC236}">
+                <a16:creationId xmlns:a16="http://schemas.microsoft.com/office/drawing/2014/main" id="{D2245848-C29F-41C8-BFF5-E8B1A6ED9064}"/>
+              </a:ext>
+            </a:extLst>
+          </p:cNvPr>
+          <p:cNvSpPr>
+            <a:spLocks noGrp="1"/>
+          </p:cNvSpPr>
+          <p:nvPr>
+            <p:ph idx="1"/>
+          </p:nvPr>
+        </p:nvSpPr>
+        <p:spPr/>
+        <p:txBody>
+          <a:bodyPr/>
+          <a:lstStyle/>
+          <a:p>
+            <a:r>
+              <a:rPr lang="en-US" dirty="0"/>
+              <a:t>Basic memory allocation, allocation algorithms. </a:t>
+            </a:r>
+          </a:p>
+          <a:p>
+            <a:pPr marL="0" indent="0">
+              <a:buNone/>
+            </a:pPr>
+            <a:endParaRPr lang="en-US" dirty="0"/>
+          </a:p>
+          <a:p>
+            <a:r>
+              <a:rPr lang="en-US" dirty="0"/>
+              <a:t>A brief introduction to x86 assembly (I’ll see what Petrucci has in mind)</a:t>
+            </a:r>
+          </a:p>
+        </p:txBody>
+      </p:sp>
+    </p:spTree>
+    <p:extLst>
+      <p:ext uri="{BB962C8B-B14F-4D97-AF65-F5344CB8AC3E}">
+        <p14:creationId xmlns:p14="http://schemas.microsoft.com/office/powerpoint/2010/main" val="2663541536"/>
+      </p:ext>
+    </p:extLst>
+  </p:cSld>
+  <p:clrMapOvr>
+    <a:masterClrMapping/>
+  </p:clrMapOvr>
+</p:sld>
+</file>
+
+<file path=ppt/slides/slide28.xml><?xml version="1.0" encoding="utf-8"?>
 <p:sld xmlns:a="http://schemas.openxmlformats.org/drawingml/2006/main" xmlns:r="http://schemas.openxmlformats.org/officeDocument/2006/relationships" xmlns:p="http://schemas.openxmlformats.org/presentationml/2006/main">
   <p:cSld>
     <p:spTree>
